--- a/public/fun/pack/pptx/weddingpro/결혼식프리미엄_41_소개중심_플래티넘아이스.pptx
+++ b/public/fun/pack/pptx/weddingpro/결혼식프리미엄_41_소개중심_플래티넘아이스.pptx
@@ -113,12 +113,12 @@
   <p:extLst>
     <p:ext uri="{521415D9-36F7-43E2-AB2F-B90AF26B5E84}">
       <p14:sectionLst xmlns:p14="http://schemas.microsoft.com/office/powerpoint/2010/main">
-        <p14:section name="시작" id="{6FE97D5B-B076-4DB3-9B2E-C8B04DE60DA8}">
+        <p14:section name="시작" id="{0D19A918-0EC3-4C92-9861-714406DB99A4}">
           <p14:sldIdLst>
             <p14:sldId id="256"/>
           </p14:sldIdLst>
         </p14:section>
-        <p14:section name="본문" id="{EB872568-EB7B-4A49-AEA0-2F353CB6FF13}">
+        <p14:section name="본문" id="{533CAA93-9AC3-44D2-9077-1F6278264F6D}">
           <p14:sldIdLst>
             <p14:sldId id="257"/>
             <p14:sldId id="258"/>
@@ -127,7 +127,7 @@
             <p14:sldId id="261"/>
           </p14:sldIdLst>
         </p14:section>
-        <p14:section name="마무리" id="{7664ED91-B399-4836-BF81-7480FB4E5363}">
+        <p14:section name="마무리" id="{6743E6A9-BA40-4FE8-8E31-69F748A4C48F}">
           <p14:sldIdLst>
             <p14:sldId id="262"/>
           </p14:sldIdLst>
@@ -3024,7 +3024,7 @@
             </a:lvl1pPr>
           </a:lstStyle>
           <a:p>
-            <a:fld id="{8E735C9C-7F49-4877-8838-B0B8A1207AC1}" type="slidenum">
+            <a:fld id="{71C4B5AA-B4B4-4611-89AD-27252B67D882}" type="slidenum">
               <a:rPr lang="en-US"/>
               <a:t>‹#›</a:t>
             </a:fld>
@@ -5817,7 +5817,7 @@
             </a:lvl1pPr>
           </a:lstStyle>
           <a:p>
-            <a:fld id="{258B943F-3037-47C2-A0CF-B02182EDEDA2}" type="slidenum">
+            <a:fld id="{7C772795-FA20-49BD-8290-16390E716F26}" type="slidenum">
               <a:rPr lang="en-US"/>
               <a:t>‹#›</a:t>
             </a:fld>
@@ -7107,7 +7107,7 @@
             </a:lvl1pPr>
           </a:lstStyle>
           <a:p>
-            <a:fld id="{325D6B00-7E21-4B6A-A1D0-3861D95C7502}" type="slidenum">
+            <a:fld id="{0CAD90D6-5042-4872-9F77-0C215B69BD1F}" type="slidenum">
               <a:rPr lang="en-US"/>
               <a:t>‹#›</a:t>
             </a:fld>
@@ -8638,7 +8638,7 @@
           <a:p>
             <a:r>
               <a:rPr lang="ko-KR"/>
-              <a:t>0000. 00. 00 · 예식장 이름</a:t>
+              <a:t>날짜 입력 · 예식장 이름</a:t>
             </a:r>
           </a:p>
         </p:txBody>
@@ -8873,7 +8873,7 @@
           <a:bodyPr/>
           <a:lstStyle/>
           <a:p>
-            <a:fld id="{751BC077-501A-41F8-91C4-47E019DF8CD9}" type="slidenum">
+            <a:fld id="{BE0FCCD1-B5A7-4B8B-8E0E-48E063B7A9C6}" type="slidenum">
               <a:rPr lang="en-US"/>
               <a:t>‹#›</a:t>
             </a:fld>
@@ -9279,7 +9279,7 @@
           <a:bodyPr/>
           <a:lstStyle/>
           <a:p>
-            <a:fld id="{C2706997-ABDB-4317-94BD-12C663BD3668}" type="slidenum">
+            <a:fld id="{82E8F85A-913B-4C3B-8A8E-DB85F45484DE}" type="slidenum">
               <a:rPr lang="en-US"/>
               <a:t>‹#›</a:t>
             </a:fld>
@@ -9881,7 +9881,7 @@
           <a:bodyPr/>
           <a:lstStyle/>
           <a:p>
-            <a:fld id="{3ED0035A-3F5D-46E2-B577-965855DD4414}" type="slidenum">
+            <a:fld id="{E28DBAC7-F860-46AA-9F04-3DFF8879C61F}" type="slidenum">
               <a:rPr lang="en-US"/>
               <a:t>‹#›</a:t>
             </a:fld>
@@ -10787,7 +10787,7 @@
           <a:bodyPr/>
           <a:lstStyle/>
           <a:p>
-            <a:fld id="{229CE567-DA5A-48AE-B10B-BF84F24007C0}" type="slidenum">
+            <a:fld id="{911EFB70-8EFF-4AC2-BDDA-587B9A4C9DCD}" type="slidenum">
               <a:rPr lang="en-US"/>
               <a:t>‹#›</a:t>
             </a:fld>
@@ -10875,7 +10875,7 @@
           <a:bodyPr/>
           <a:lstStyle/>
           <a:p>
-            <a:fld id="{5B25D41B-CB61-47D9-9E1E-758928A8C2D3}" type="slidenum">
+            <a:fld id="{4D58C583-17ED-4BAE-8060-3C35BF9BC214}" type="slidenum">
               <a:rPr lang="en-US"/>
               <a:t>‹#›</a:t>
             </a:fld>
